--- a/lectures/050_git_version_control/Why do you need version control.pptx
+++ b/lectures/050_git_version_control/Why do you need version control.pptx
@@ -595,7 +595,7 @@
           <a:p>
             <a:fld id="{DAE750E4-9074-4DF5-8B01-0BB2C4E5C301}" type="datetimeFigureOut">
               <a:rPr lang="en-US" smtClean="0"/>
-              <a:t>9/17/25</a:t>
+              <a:t>1/20/26</a:t>
             </a:fld>
             <a:endParaRPr lang="en-US"/>
           </a:p>
@@ -1831,7 +1831,7 @@
           <a:p>
             <a:fld id="{736637C2-0074-4FEF-AEBC-2720ADB5AC51}" type="datetimeFigureOut">
               <a:rPr lang="en-US" smtClean="0"/>
-              <a:t>9/17/25</a:t>
+              <a:t>1/20/26</a:t>
             </a:fld>
             <a:endParaRPr lang="en-US"/>
           </a:p>
@@ -2061,7 +2061,7 @@
           <a:p>
             <a:fld id="{736637C2-0074-4FEF-AEBC-2720ADB5AC51}" type="datetimeFigureOut">
               <a:rPr lang="en-US" smtClean="0"/>
-              <a:t>9/17/25</a:t>
+              <a:t>1/20/26</a:t>
             </a:fld>
             <a:endParaRPr lang="en-US"/>
           </a:p>
@@ -2301,7 +2301,7 @@
           <a:p>
             <a:fld id="{736637C2-0074-4FEF-AEBC-2720ADB5AC51}" type="datetimeFigureOut">
               <a:rPr lang="en-US" smtClean="0"/>
-              <a:t>9/17/25</a:t>
+              <a:t>1/20/26</a:t>
             </a:fld>
             <a:endParaRPr lang="en-US"/>
           </a:p>
@@ -2531,7 +2531,7 @@
           <a:p>
             <a:fld id="{736637C2-0074-4FEF-AEBC-2720ADB5AC51}" type="datetimeFigureOut">
               <a:rPr lang="en-US" smtClean="0"/>
-              <a:t>9/17/25</a:t>
+              <a:t>1/20/26</a:t>
             </a:fld>
             <a:endParaRPr lang="en-US"/>
           </a:p>
@@ -2783,7 +2783,7 @@
           <a:p>
             <a:fld id="{736637C2-0074-4FEF-AEBC-2720ADB5AC51}" type="datetimeFigureOut">
               <a:rPr lang="en-US" smtClean="0"/>
-              <a:t>9/17/25</a:t>
+              <a:t>1/20/26</a:t>
             </a:fld>
             <a:endParaRPr lang="en-US"/>
           </a:p>
@@ -3015,7 +3015,7 @@
           <a:p>
             <a:fld id="{736637C2-0074-4FEF-AEBC-2720ADB5AC51}" type="datetimeFigureOut">
               <a:rPr lang="en-US" smtClean="0"/>
-              <a:t>9/17/25</a:t>
+              <a:t>1/20/26</a:t>
             </a:fld>
             <a:endParaRPr lang="en-US"/>
           </a:p>
@@ -3382,7 +3382,7 @@
           <a:p>
             <a:fld id="{736637C2-0074-4FEF-AEBC-2720ADB5AC51}" type="datetimeFigureOut">
               <a:rPr lang="en-US" smtClean="0"/>
-              <a:t>9/17/25</a:t>
+              <a:t>1/20/26</a:t>
             </a:fld>
             <a:endParaRPr lang="en-US"/>
           </a:p>
@@ -3510,7 +3510,7 @@
           <a:p>
             <a:fld id="{736637C2-0074-4FEF-AEBC-2720ADB5AC51}" type="datetimeFigureOut">
               <a:rPr lang="en-US" smtClean="0"/>
-              <a:t>9/17/25</a:t>
+              <a:t>1/20/26</a:t>
             </a:fld>
             <a:endParaRPr lang="en-US"/>
           </a:p>
@@ -3605,7 +3605,7 @@
           <a:p>
             <a:fld id="{736637C2-0074-4FEF-AEBC-2720ADB5AC51}" type="datetimeFigureOut">
               <a:rPr lang="en-US" smtClean="0"/>
-              <a:t>9/17/25</a:t>
+              <a:t>1/20/26</a:t>
             </a:fld>
             <a:endParaRPr lang="en-US"/>
           </a:p>
@@ -3882,7 +3882,7 @@
           <a:p>
             <a:fld id="{736637C2-0074-4FEF-AEBC-2720ADB5AC51}" type="datetimeFigureOut">
               <a:rPr lang="en-US" smtClean="0"/>
-              <a:t>9/17/25</a:t>
+              <a:t>1/20/26</a:t>
             </a:fld>
             <a:endParaRPr lang="en-US"/>
           </a:p>
@@ -4139,7 +4139,7 @@
           <a:p>
             <a:fld id="{736637C2-0074-4FEF-AEBC-2720ADB5AC51}" type="datetimeFigureOut">
               <a:rPr lang="en-US" smtClean="0"/>
-              <a:t>9/17/25</a:t>
+              <a:t>1/20/26</a:t>
             </a:fld>
             <a:endParaRPr lang="en-US"/>
           </a:p>
@@ -4355,7 +4355,7 @@
           <a:p>
             <a:fld id="{736637C2-0074-4FEF-AEBC-2720ADB5AC51}" type="datetimeFigureOut">
               <a:rPr lang="en-US" smtClean="0"/>
-              <a:t>9/17/25</a:t>
+              <a:t>1/20/26</a:t>
             </a:fld>
             <a:endParaRPr lang="en-US"/>
           </a:p>
@@ -16124,14 +16124,14 @@
           <p:nvPr>
             <p:extLst>
               <p:ext uri="{D42A27DB-BD31-4B8C-83A1-F6EECF244321}">
-                <p14:modId xmlns:p14="http://schemas.microsoft.com/office/powerpoint/2010/main" val="341327897"/>
+                <p14:modId xmlns:p14="http://schemas.microsoft.com/office/powerpoint/2010/main" val="497266418"/>
               </p:ext>
             </p:extLst>
           </p:nvPr>
         </p:nvGraphicFramePr>
         <p:xfrm>
-          <a:off x="2165074" y="4633891"/>
-          <a:ext cx="9722394" cy="2133600"/>
+          <a:off x="2165073" y="4395141"/>
+          <a:ext cx="9722394" cy="2458608"/>
         </p:xfrm>
         <a:graphic>
           <a:graphicData uri="http://schemas.openxmlformats.org/drawingml/2006/table">
@@ -16160,7 +16160,7 @@
                   </a:extLst>
                 </a:gridCol>
               </a:tblGrid>
-              <a:tr h="263480">
+              <a:tr h="307326">
                 <a:tc>
                   <a:txBody>
                     <a:bodyPr/>
@@ -16289,7 +16289,161 @@
                   </a:ext>
                 </a:extLst>
               </a:tr>
-              <a:tr h="263480">
+              <a:tr h="307326">
+                <a:tc>
+                  <a:txBody>
+                    <a:bodyPr/>
+                    <a:lstStyle/>
+                    <a:p>
+                      <a:pPr algn="r"/>
+                      <a:r>
+                        <a:rPr lang="en-US" sz="1400" dirty="0">
+                          <a:latin typeface="Consolas" panose="020B0609020204030204" pitchFamily="49" charset="0"/>
+                          <a:cs typeface="Consolas" panose="020B0609020204030204" pitchFamily="49" charset="0"/>
+                        </a:rPr>
+                        <a:t>Create a new file (in Linux or OSX do </a:t>
+                      </a:r>
+                      <a:r>
+                        <a:rPr lang="en-US" sz="1400" i="1" dirty="0">
+                          <a:latin typeface="Consolas" panose="020B0609020204030204" pitchFamily="49" charset="0"/>
+                          <a:cs typeface="Consolas" panose="020B0609020204030204" pitchFamily="49" charset="0"/>
+                        </a:rPr>
+                        <a:t>touch </a:t>
+                      </a:r>
+                      <a:r>
+                        <a:rPr lang="en-US" sz="1400" i="1" dirty="0" err="1">
+                          <a:latin typeface="Consolas" panose="020B0609020204030204" pitchFamily="49" charset="0"/>
+                          <a:cs typeface="Consolas" panose="020B0609020204030204" pitchFamily="49" charset="0"/>
+                        </a:rPr>
+                        <a:t>test_file.txt</a:t>
+                      </a:r>
+                      <a:r>
+                        <a:rPr lang="en-US" sz="1400" dirty="0">
+                          <a:latin typeface="Consolas" panose="020B0609020204030204" pitchFamily="49" charset="0"/>
+                          <a:cs typeface="Consolas" panose="020B0609020204030204" pitchFamily="49" charset="0"/>
+                        </a:rPr>
+                        <a:t>)</a:t>
+                      </a:r>
+                    </a:p>
+                  </a:txBody>
+                  <a:tcPr>
+                    <a:lnL w="12700" cmpd="sng">
+                      <a:noFill/>
+                      <a:prstDash val="solid"/>
+                    </a:lnL>
+                    <a:lnR w="12700" cmpd="sng">
+                      <a:noFill/>
+                      <a:prstDash val="solid"/>
+                    </a:lnR>
+                    <a:lnT w="12700" cmpd="sng">
+                      <a:noFill/>
+                      <a:prstDash val="solid"/>
+                    </a:lnT>
+                    <a:lnB w="12700" cmpd="sng">
+                      <a:noFill/>
+                      <a:prstDash val="solid"/>
+                    </a:lnB>
+                    <a:lnTlToBr w="12700" cmpd="sng">
+                      <a:noFill/>
+                      <a:prstDash val="solid"/>
+                    </a:lnTlToBr>
+                    <a:lnBlToTr w="12700" cmpd="sng">
+                      <a:noFill/>
+                      <a:prstDash val="solid"/>
+                    </a:lnBlToTr>
+                  </a:tcPr>
+                </a:tc>
+                <a:tc>
+                  <a:txBody>
+                    <a:bodyPr/>
+                    <a:lstStyle/>
+                    <a:p>
+                      <a:pPr algn="r"/>
+                      <a:endParaRPr lang="en-US" sz="1400" dirty="0">
+                        <a:latin typeface="Consolas" panose="020B0609020204030204" pitchFamily="49" charset="0"/>
+                        <a:cs typeface="Consolas" panose="020B0609020204030204" pitchFamily="49" charset="0"/>
+                      </a:endParaRPr>
+                    </a:p>
+                  </a:txBody>
+                  <a:tcPr>
+                    <a:lnL w="12700" cmpd="sng">
+                      <a:noFill/>
+                      <a:prstDash val="solid"/>
+                    </a:lnL>
+                    <a:lnR w="12700" cmpd="sng">
+                      <a:noFill/>
+                      <a:prstDash val="solid"/>
+                    </a:lnR>
+                    <a:lnT w="12700" cmpd="sng">
+                      <a:noFill/>
+                      <a:prstDash val="solid"/>
+                    </a:lnT>
+                    <a:lnB w="12700" cmpd="sng">
+                      <a:noFill/>
+                      <a:prstDash val="solid"/>
+                    </a:lnB>
+                    <a:lnTlToBr w="12700" cmpd="sng">
+                      <a:noFill/>
+                      <a:prstDash val="solid"/>
+                    </a:lnTlToBr>
+                    <a:lnBlToTr w="12700" cmpd="sng">
+                      <a:noFill/>
+                      <a:prstDash val="solid"/>
+                    </a:lnBlToTr>
+                  </a:tcPr>
+                </a:tc>
+                <a:tc>
+                  <a:txBody>
+                    <a:bodyPr/>
+                    <a:lstStyle/>
+                    <a:p>
+                      <a:r>
+                        <a:rPr lang="en-US" sz="1400" dirty="0" err="1">
+                          <a:latin typeface="Consolas" panose="020B0609020204030204" pitchFamily="49" charset="0"/>
+                          <a:cs typeface="Consolas" panose="020B0609020204030204" pitchFamily="49" charset="0"/>
+                        </a:rPr>
+                        <a:t>test_file.txt</a:t>
+                      </a:r>
+                      <a:endParaRPr lang="en-US" sz="1400" dirty="0">
+                        <a:latin typeface="Consolas" panose="020B0609020204030204" pitchFamily="49" charset="0"/>
+                        <a:cs typeface="Consolas" panose="020B0609020204030204" pitchFamily="49" charset="0"/>
+                      </a:endParaRPr>
+                    </a:p>
+                  </a:txBody>
+                  <a:tcPr>
+                    <a:lnL w="12700" cmpd="sng">
+                      <a:noFill/>
+                      <a:prstDash val="solid"/>
+                    </a:lnL>
+                    <a:lnR w="12700" cmpd="sng">
+                      <a:noFill/>
+                      <a:prstDash val="solid"/>
+                    </a:lnR>
+                    <a:lnT w="12700" cmpd="sng">
+                      <a:noFill/>
+                      <a:prstDash val="solid"/>
+                    </a:lnT>
+                    <a:lnB w="12700" cmpd="sng">
+                      <a:noFill/>
+                      <a:prstDash val="solid"/>
+                    </a:lnB>
+                    <a:lnTlToBr w="12700" cmpd="sng">
+                      <a:noFill/>
+                      <a:prstDash val="solid"/>
+                    </a:lnTlToBr>
+                    <a:lnBlToTr w="12700" cmpd="sng">
+                      <a:noFill/>
+                      <a:prstDash val="solid"/>
+                    </a:lnBlToTr>
+                  </a:tcPr>
+                </a:tc>
+                <a:extLst>
+                  <a:ext uri="{0D108BD9-81ED-4DB2-BD59-A6C34878D82A}">
+                    <a16:rowId xmlns:a16="http://schemas.microsoft.com/office/drawing/2014/main" val="72579681"/>
+                  </a:ext>
+                </a:extLst>
+              </a:tr>
+              <a:tr h="307326">
                 <a:tc>
                   <a:txBody>
                     <a:bodyPr/>
@@ -16376,12 +16530,50 @@
                     <a:bodyPr/>
                     <a:lstStyle/>
                     <a:p>
+                      <a:pPr marL="0" marR="0" lvl="0" indent="0" algn="l" defTabSz="914400" rtl="0" eaLnBrk="1" fontAlgn="auto" latinLnBrk="0" hangingPunct="1">
+                        <a:lnSpc>
+                          <a:spcPct val="100000"/>
+                        </a:lnSpc>
+                        <a:spcBef>
+                          <a:spcPts val="0"/>
+                        </a:spcBef>
+                        <a:spcAft>
+                          <a:spcPts val="0"/>
+                        </a:spcAft>
+                        <a:buClrTx/>
+                        <a:buSzTx/>
+                        <a:buFontTx/>
+                        <a:buNone/>
+                        <a:tabLst/>
+                        <a:defRPr/>
+                      </a:pPr>
                       <a:r>
                         <a:rPr lang="en-US" sz="1400" dirty="0">
                           <a:latin typeface="Consolas" panose="020B0609020204030204" pitchFamily="49" charset="0"/>
                           <a:cs typeface="Consolas" panose="020B0609020204030204" pitchFamily="49" charset="0"/>
                         </a:rPr>
-                        <a:t>git add</a:t>
+                        <a:t>git add </a:t>
+                      </a:r>
+                      <a:r>
+                        <a:rPr lang="en-US" sz="1400" dirty="0" err="1">
+                          <a:latin typeface="Consolas" panose="020B0609020204030204" pitchFamily="49" charset="0"/>
+                          <a:cs typeface="Consolas" panose="020B0609020204030204" pitchFamily="49" charset="0"/>
+                        </a:rPr>
+                        <a:t>test_file</a:t>
+                      </a:r>
+                      <a:r>
+                        <a:rPr lang="en-US" sz="1400" err="1">
+                          <a:latin typeface="Consolas" panose="020B0609020204030204" pitchFamily="49" charset="0"/>
+                          <a:cs typeface="Consolas" panose="020B0609020204030204" pitchFamily="49" charset="0"/>
+                        </a:rPr>
+                        <a:t>.</a:t>
+                      </a:r>
+                      <a:r>
+                        <a:rPr lang="en-US" sz="1400">
+                          <a:latin typeface="Consolas" panose="020B0609020204030204" pitchFamily="49" charset="0"/>
+                          <a:cs typeface="Consolas" panose="020B0609020204030204" pitchFamily="49" charset="0"/>
+                        </a:rPr>
+                        <a:t>txt</a:t>
                       </a:r>
                     </a:p>
                   </a:txBody>
@@ -16418,7 +16610,7 @@
                   </a:ext>
                 </a:extLst>
               </a:tr>
-              <a:tr h="263480">
+              <a:tr h="307326">
                 <a:tc>
                   <a:txBody>
                     <a:bodyPr/>
@@ -16547,7 +16739,7 @@
                   </a:ext>
                 </a:extLst>
               </a:tr>
-              <a:tr h="263480">
+              <a:tr h="307326">
                 <a:tc>
                   <a:txBody>
                     <a:bodyPr/>
@@ -16676,7 +16868,7 @@
                   </a:ext>
                 </a:extLst>
               </a:tr>
-              <a:tr h="263480">
+              <a:tr h="307326">
                 <a:tc>
                   <a:txBody>
                     <a:bodyPr/>
@@ -16816,7 +17008,7 @@
                   </a:ext>
                 </a:extLst>
               </a:tr>
-              <a:tr h="263480">
+              <a:tr h="307326">
                 <a:tc>
                   <a:txBody>
                     <a:bodyPr/>
@@ -16956,7 +17148,7 @@
                   </a:ext>
                 </a:extLst>
               </a:tr>
-              <a:tr h="263480">
+              <a:tr h="307326">
                 <a:tc>
                   <a:txBody>
                     <a:bodyPr/>
